--- a/material2.pptx
+++ b/material2.pptx
@@ -36,14 +36,13 @@
     <p:sldId id="284" r:id="rId34"/>
     <p:sldId id="285" r:id="rId35"/>
     <p:sldId id="286" r:id="rId36"/>
-    <p:sldId id="287" r:id="rId37"/>
   </p:sldIdLst>
   <p:sldSz cx="18288000" cy="10287000"/>
   <p:notesSz cx="6858000" cy="9144000"/>
   <p:embeddedFontLst>
     <p:embeddedFont>
       <p:font typeface="Handyman" charset="1" panose="00000000000000000000"/>
-      <p:regular r:id="rId38"/>
+      <p:regular r:id="rId37"/>
     </p:embeddedFont>
   </p:embeddedFontLst>
   <p:defaultTextStyle>
@@ -10722,351 +10721,6 @@
 </file>
 
 <file path=ppt/slides/slide31.xml><?xml version="1.0" encoding="utf-8"?>
-<p:sld xmlns:p="http://schemas.openxmlformats.org/presentationml/2006/main" xmlns:a="http://schemas.openxmlformats.org/drawingml/2006/main" xmlns:r="http://schemas.openxmlformats.org/officeDocument/2006/relationships">
-  <p:cSld>
-    <p:spTree>
-      <p:nvGrpSpPr>
-        <p:cNvPr id="1" name=""/>
-        <p:cNvGrpSpPr/>
-        <p:nvPr/>
-      </p:nvGrpSpPr>
-      <p:grpSpPr>
-        <a:xfrm>
-          <a:off x="0" y="0"/>
-          <a:ext cx="0" cy="0"/>
-          <a:chOff x="0" y="0"/>
-          <a:chExt cx="0" cy="0"/>
-        </a:xfrm>
-      </p:grpSpPr>
-      <p:grpSp>
-        <p:nvGrpSpPr>
-          <p:cNvPr name="Group 2" id="2"/>
-          <p:cNvGrpSpPr/>
-          <p:nvPr/>
-        </p:nvGrpSpPr>
-        <p:grpSpPr>
-          <a:xfrm rot="0">
-            <a:off x="572449" y="669078"/>
-            <a:ext cx="2412630" cy="1326234"/>
-            <a:chOff x="0" y="0"/>
-            <a:chExt cx="2454071" cy="1349024"/>
-          </a:xfrm>
-        </p:grpSpPr>
-        <p:sp>
-          <p:nvSpPr>
-            <p:cNvPr name="Freeform 3" id="3"/>
-            <p:cNvSpPr/>
-            <p:nvPr/>
-          </p:nvSpPr>
-          <p:spPr>
-            <a:xfrm flipH="false" flipV="false" rot="0">
-              <a:off x="0" y="0"/>
-              <a:ext cx="2454071" cy="1349024"/>
-            </a:xfrm>
-            <a:custGeom>
-              <a:avLst/>
-              <a:gdLst/>
-              <a:ahLst/>
-              <a:cxnLst/>
-              <a:rect r="r" b="b" t="t" l="l"/>
-              <a:pathLst>
-                <a:path h="1349024" w="2454071">
-                  <a:moveTo>
-                    <a:pt x="2454071" y="674512"/>
-                  </a:moveTo>
-                  <a:lnTo>
-                    <a:pt x="2454071" y="674512"/>
-                  </a:lnTo>
-                  <a:cubicBezTo>
-                    <a:pt x="2454071" y="1047035"/>
-                    <a:pt x="2152081" y="1349024"/>
-                    <a:pt x="1779559" y="1349024"/>
-                  </a:cubicBezTo>
-                  <a:lnTo>
-                    <a:pt x="674512" y="1349024"/>
-                  </a:lnTo>
-                  <a:cubicBezTo>
-                    <a:pt x="301989" y="1349024"/>
-                    <a:pt x="0" y="1047035"/>
-                    <a:pt x="0" y="674512"/>
-                  </a:cubicBezTo>
-                  <a:lnTo>
-                    <a:pt x="0" y="674512"/>
-                  </a:lnTo>
-                  <a:cubicBezTo>
-                    <a:pt x="0" y="301989"/>
-                    <a:pt x="301989" y="0"/>
-                    <a:pt x="674512" y="0"/>
-                  </a:cubicBezTo>
-                  <a:lnTo>
-                    <a:pt x="1779559" y="0"/>
-                  </a:lnTo>
-                  <a:cubicBezTo>
-                    <a:pt x="1958450" y="0"/>
-                    <a:pt x="2130015" y="71064"/>
-                    <a:pt x="2256511" y="197560"/>
-                  </a:cubicBezTo>
-                  <a:cubicBezTo>
-                    <a:pt x="2383006" y="324056"/>
-                    <a:pt x="2454071" y="495620"/>
-                    <a:pt x="2454071" y="674512"/>
-                  </a:cubicBezTo>
-                  <a:close/>
-                </a:path>
-              </a:pathLst>
-            </a:custGeom>
-            <a:solidFill>
-              <a:srgbClr val="FFC9C9"/>
-            </a:solidFill>
-          </p:spPr>
-        </p:sp>
-        <p:sp>
-          <p:nvSpPr>
-            <p:cNvPr name="TextBox 4" id="4"/>
-            <p:cNvSpPr txBox="true"/>
-            <p:nvPr/>
-          </p:nvSpPr>
-          <p:spPr>
-            <a:xfrm>
-              <a:off x="0" y="-38100"/>
-              <a:ext cx="2454071" cy="1387124"/>
-            </a:xfrm>
-            <a:prstGeom prst="rect">
-              <a:avLst/>
-            </a:prstGeom>
-          </p:spPr>
-          <p:txBody>
-            <a:bodyPr anchor="ctr" rtlCol="false" tIns="50800" lIns="50800" bIns="50800" rIns="50800"/>
-            <a:lstStyle/>
-            <a:p>
-              <a:pPr algn="ctr">
-                <a:lnSpc>
-                  <a:spcPts val="2659"/>
-                </a:lnSpc>
-                <a:spcBef>
-                  <a:spcPct val="0"/>
-                </a:spcBef>
-              </a:pPr>
-            </a:p>
-          </p:txBody>
-        </p:sp>
-      </p:grpSp>
-      <p:sp>
-        <p:nvSpPr>
-          <p:cNvPr name="Freeform 5" id="5"/>
-          <p:cNvSpPr/>
-          <p:nvPr/>
-        </p:nvSpPr>
-        <p:spPr>
-          <a:xfrm flipH="false" flipV="false" rot="0">
-            <a:off x="789916" y="881046"/>
-            <a:ext cx="902299" cy="902299"/>
-          </a:xfrm>
-          <a:custGeom>
-            <a:avLst/>
-            <a:gdLst/>
-            <a:ahLst/>
-            <a:cxnLst/>
-            <a:rect r="r" b="b" t="t" l="l"/>
-            <a:pathLst>
-              <a:path h="902299" w="902299">
-                <a:moveTo>
-                  <a:pt x="0" y="0"/>
-                </a:moveTo>
-                <a:lnTo>
-                  <a:pt x="902299" y="0"/>
-                </a:lnTo>
-                <a:lnTo>
-                  <a:pt x="902299" y="902299"/>
-                </a:lnTo>
-                <a:lnTo>
-                  <a:pt x="0" y="902299"/>
-                </a:lnTo>
-                <a:lnTo>
-                  <a:pt x="0" y="0"/>
-                </a:lnTo>
-                <a:close/>
-              </a:path>
-            </a:pathLst>
-          </a:custGeom>
-          <a:blipFill>
-            <a:blip r:embed="rId2"/>
-            <a:stretch>
-              <a:fillRect l="0" t="0" r="0" b="0"/>
-            </a:stretch>
-          </a:blipFill>
-        </p:spPr>
-      </p:sp>
-      <p:sp>
-        <p:nvSpPr>
-          <p:cNvPr name="TextBox 6" id="6"/>
-          <p:cNvSpPr txBox="true"/>
-          <p:nvPr/>
-        </p:nvSpPr>
-        <p:spPr>
-          <a:xfrm rot="0">
-            <a:off x="2003964" y="759317"/>
-            <a:ext cx="476717" cy="945731"/>
-          </a:xfrm>
-          <a:prstGeom prst="rect">
-            <a:avLst/>
-          </a:prstGeom>
-        </p:spPr>
-        <p:txBody>
-          <a:bodyPr anchor="t" rtlCol="false" tIns="0" lIns="0" bIns="0" rIns="0">
-            <a:spAutoFit/>
-          </a:bodyPr>
-          <a:lstStyle/>
-          <a:p>
-            <a:pPr algn="ctr" marL="0" indent="0" lvl="0">
-              <a:lnSpc>
-                <a:spcPts val="6996"/>
-              </a:lnSpc>
-              <a:spcBef>
-                <a:spcPct val="0"/>
-              </a:spcBef>
-            </a:pPr>
-            <a:r>
-              <a:rPr lang="en-US" sz="4997">
-                <a:solidFill>
-                  <a:srgbClr val="F88888"/>
-                </a:solidFill>
-                <a:latin typeface="Handyman"/>
-                <a:ea typeface="Handyman"/>
-                <a:cs typeface="Handyman"/>
-                <a:sym typeface="Handyman"/>
-              </a:rPr>
-              <a:t>M</a:t>
-            </a:r>
-          </a:p>
-        </p:txBody>
-      </p:sp>
-      <p:sp>
-        <p:nvSpPr>
-          <p:cNvPr name="TextBox 7" id="7"/>
-          <p:cNvSpPr txBox="true"/>
-          <p:nvPr/>
-        </p:nvSpPr>
-        <p:spPr>
-          <a:xfrm rot="0">
-            <a:off x="4308945" y="704850"/>
-            <a:ext cx="9670110" cy="1554931"/>
-          </a:xfrm>
-          <a:prstGeom prst="rect">
-            <a:avLst/>
-          </a:prstGeom>
-        </p:spPr>
-        <p:txBody>
-          <a:bodyPr anchor="t" rtlCol="false" tIns="0" lIns="0" bIns="0" rIns="0">
-            <a:spAutoFit/>
-          </a:bodyPr>
-          <a:lstStyle/>
-          <a:p>
-            <a:pPr algn="ctr" marL="0" indent="0" lvl="0">
-              <a:lnSpc>
-                <a:spcPts val="11549"/>
-              </a:lnSpc>
-              <a:spcBef>
-                <a:spcPct val="0"/>
-              </a:spcBef>
-            </a:pPr>
-            <a:r>
-              <a:rPr lang="en-US" sz="8249">
-                <a:solidFill>
-                  <a:srgbClr val="000000"/>
-                </a:solidFill>
-                <a:latin typeface="Handyman"/>
-                <a:ea typeface="Handyman"/>
-                <a:cs typeface="Handyman"/>
-                <a:sym typeface="Handyman"/>
-              </a:rPr>
-              <a:t>Nota:</a:t>
-            </a:r>
-          </a:p>
-        </p:txBody>
-      </p:sp>
-      <p:sp>
-        <p:nvSpPr>
-          <p:cNvPr name="TextBox 8" id="8"/>
-          <p:cNvSpPr txBox="true"/>
-          <p:nvPr/>
-        </p:nvSpPr>
-        <p:spPr>
-          <a:xfrm rot="0">
-            <a:off x="1241066" y="2887420"/>
-            <a:ext cx="16076320" cy="6370880"/>
-          </a:xfrm>
-          <a:prstGeom prst="rect">
-            <a:avLst/>
-          </a:prstGeom>
-        </p:spPr>
-        <p:txBody>
-          <a:bodyPr anchor="t" rtlCol="false" tIns="0" lIns="0" bIns="0" rIns="0">
-            <a:spAutoFit/>
-          </a:bodyPr>
-          <a:lstStyle/>
-          <a:p>
-            <a:pPr algn="ctr">
-              <a:lnSpc>
-                <a:spcPts val="8398"/>
-              </a:lnSpc>
-            </a:pPr>
-            <a:r>
-              <a:rPr lang="en-US" sz="5998">
-                <a:solidFill>
-                  <a:srgbClr val="A6A6A6"/>
-                </a:solidFill>
-                <a:latin typeface="Handyman"/>
-                <a:ea typeface="Handyman"/>
-                <a:cs typeface="Handyman"/>
-                <a:sym typeface="Handyman"/>
-              </a:rPr>
-              <a:t>Muito obrigado, professora Claudia, ao professor de DS, ao professor Charles, a professora hely e o diretor por ter me ajudado nesse projeto</a:t>
-            </a:r>
-          </a:p>
-          <a:p>
-            <a:pPr algn="ctr">
-              <a:lnSpc>
-                <a:spcPts val="8398"/>
-              </a:lnSpc>
-            </a:pPr>
-          </a:p>
-          <a:p>
-            <a:pPr algn="ctr" marL="0" indent="0" lvl="0">
-              <a:lnSpc>
-                <a:spcPts val="8398"/>
-              </a:lnSpc>
-              <a:spcBef>
-                <a:spcPct val="0"/>
-              </a:spcBef>
-            </a:pPr>
-            <a:r>
-              <a:rPr lang="en-US" sz="5998">
-                <a:solidFill>
-                  <a:srgbClr val="A6A6A6"/>
-                </a:solidFill>
-                <a:latin typeface="Handyman"/>
-                <a:ea typeface="Handyman"/>
-                <a:cs typeface="Handyman"/>
-                <a:sym typeface="Handyman"/>
-              </a:rPr>
-              <a:t>E muito obrigado aos outros que contribuíram tambem</a:t>
-            </a:r>
-          </a:p>
-        </p:txBody>
-      </p:sp>
-    </p:spTree>
-  </p:cSld>
-  <p:clrMapOvr>
-    <a:masterClrMapping/>
-  </p:clrMapOvr>
-  <p:transition spd="slow">
-    <p:push dir="l"/>
-  </p:transition>
-</p:sld>
-</file>
-
-<file path=ppt/slides/slide32.xml><?xml version="1.0" encoding="utf-8"?>
 <p:sld xmlns:p="http://schemas.openxmlformats.org/presentationml/2006/main" xmlns:a="http://schemas.openxmlformats.org/drawingml/2006/main" xmlns:r="http://schemas.openxmlformats.org/officeDocument/2006/relationships">
   <p:cSld>
     <p:spTree>

--- a/material2.pptx
+++ b/material2.pptx
@@ -6200,7 +6200,7 @@
                 <a:cs typeface="Handyman"/>
                 <a:sym typeface="Handyman"/>
               </a:rPr>
-              <a:t>Diário e anotações: um bloco de notas que usa armazenamento local (localStorage) para suas anotações!</a:t>
+              <a:t>Diário e anotações: um bloco de notas que usa criptografia para suas anotações!</a:t>
             </a:r>
           </a:p>
         </p:txBody>

--- a/material2.pptx
+++ b/material2.pptx
@@ -36,13 +36,14 @@
     <p:sldId id="284" r:id="rId34"/>
     <p:sldId id="285" r:id="rId35"/>
     <p:sldId id="286" r:id="rId36"/>
+    <p:sldId id="287" r:id="rId37"/>
   </p:sldIdLst>
   <p:sldSz cx="18288000" cy="10287000"/>
   <p:notesSz cx="6858000" cy="9144000"/>
   <p:embeddedFontLst>
     <p:embeddedFont>
       <p:font typeface="Handyman" charset="1" panose="00000000000000000000"/>
-      <p:regular r:id="rId37"/>
+      <p:regular r:id="rId38"/>
     </p:embeddedFont>
   </p:embeddedFontLst>
   <p:defaultTextStyle>
@@ -9059,8 +9060,8 @@
         </p:nvSpPr>
         <p:spPr>
           <a:xfrm rot="0">
-            <a:off x="2480681" y="4964815"/>
-            <a:ext cx="13818821" cy="4293485"/>
+            <a:off x="1778763" y="5892107"/>
+            <a:ext cx="15222657" cy="3366193"/>
           </a:xfrm>
           <a:prstGeom prst="rect">
             <a:avLst/>
@@ -9074,11 +9075,11 @@
           <a:p>
             <a:pPr algn="ctr">
               <a:lnSpc>
-                <a:spcPts val="16584"/>
+                <a:spcPts val="8785"/>
               </a:lnSpc>
             </a:pPr>
             <a:r>
-              <a:rPr lang="en-US" sz="11845">
+              <a:rPr lang="en-US" sz="6275">
                 <a:solidFill>
                   <a:srgbClr val="A6A6A6"/>
                 </a:solidFill>
@@ -9087,20 +9088,20 @@
                 <a:cs typeface="Handyman"/>
                 <a:sym typeface="Handyman"/>
               </a:rPr>
-              <a:t>Saindo do app, </a:t>
+              <a:t>Escolher ícone do app:</a:t>
             </a:r>
           </a:p>
           <a:p>
             <a:pPr algn="ctr" marL="0" indent="0" lvl="0">
               <a:lnSpc>
-                <a:spcPts val="16584"/>
+                <a:spcPts val="8785"/>
               </a:lnSpc>
               <a:spcBef>
                 <a:spcPct val="0"/>
               </a:spcBef>
             </a:pPr>
             <a:r>
-              <a:rPr lang="en-US" sz="11845">
+              <a:rPr lang="en-US" sz="6275">
                 <a:solidFill>
                   <a:srgbClr val="A6A6A6"/>
                 </a:solidFill>
@@ -9109,7 +9110,7 @@
                 <a:cs typeface="Handyman"/>
                 <a:sym typeface="Handyman"/>
               </a:rPr>
-              <a:t>temos...</a:t>
+              <a:t>Essa função abre uma acitvity e poderá trocar o ícone do app!</a:t>
             </a:r>
           </a:p>
         </p:txBody>
@@ -9397,8 +9398,8 @@
         </p:nvSpPr>
         <p:spPr>
           <a:xfrm rot="0">
-            <a:off x="2172298" y="4256753"/>
-            <a:ext cx="13943405" cy="5001547"/>
+            <a:off x="2480681" y="4964815"/>
+            <a:ext cx="13818821" cy="4293485"/>
           </a:xfrm>
           <a:prstGeom prst="rect">
             <a:avLst/>
@@ -9410,16 +9411,13 @@
           </a:bodyPr>
           <a:lstStyle/>
           <a:p>
-            <a:pPr algn="ctr" marL="0" indent="0" lvl="0">
+            <a:pPr algn="ctr">
               <a:lnSpc>
-                <a:spcPts val="13030"/>
+                <a:spcPts val="16584"/>
               </a:lnSpc>
-              <a:spcBef>
-                <a:spcPct val="0"/>
-              </a:spcBef>
             </a:pPr>
             <a:r>
-              <a:rPr lang="en-US" sz="9307">
+              <a:rPr lang="en-US" sz="11845">
                 <a:solidFill>
                   <a:srgbClr val="A6A6A6"/>
                 </a:solidFill>
@@ -9428,7 +9426,29 @@
                 <a:cs typeface="Handyman"/>
                 <a:sym typeface="Handyman"/>
               </a:rPr>
-              <a:t>Widget de SOS: ao clicar nele, abre o app de telefone já discado no 180!</a:t>
+              <a:t>Saindo do app, </a:t>
+            </a:r>
+          </a:p>
+          <a:p>
+            <a:pPr algn="ctr" marL="0" indent="0" lvl="0">
+              <a:lnSpc>
+                <a:spcPts val="16584"/>
+              </a:lnSpc>
+              <a:spcBef>
+                <a:spcPct val="0"/>
+              </a:spcBef>
+            </a:pPr>
+            <a:r>
+              <a:rPr lang="en-US" sz="11845">
+                <a:solidFill>
+                  <a:srgbClr val="A6A6A6"/>
+                </a:solidFill>
+                <a:latin typeface="Handyman"/>
+                <a:ea typeface="Handyman"/>
+                <a:cs typeface="Handyman"/>
+                <a:sym typeface="Handyman"/>
+              </a:rPr>
+              <a:t>temos...</a:t>
             </a:r>
           </a:p>
         </p:txBody>
@@ -9716,8 +9736,8 @@
         </p:nvSpPr>
         <p:spPr>
           <a:xfrm rot="0">
-            <a:off x="2480681" y="4258475"/>
-            <a:ext cx="13326637" cy="4999825"/>
+            <a:off x="2172298" y="4256753"/>
+            <a:ext cx="13943405" cy="5001547"/>
           </a:xfrm>
           <a:prstGeom prst="rect">
             <a:avLst/>
@@ -9731,14 +9751,14 @@
           <a:p>
             <a:pPr algn="ctr" marL="0" indent="0" lvl="0">
               <a:lnSpc>
-                <a:spcPts val="9844"/>
+                <a:spcPts val="13030"/>
               </a:lnSpc>
               <a:spcBef>
                 <a:spcPct val="0"/>
               </a:spcBef>
             </a:pPr>
             <a:r>
-              <a:rPr lang="en-US" sz="7031">
+              <a:rPr lang="en-US" sz="9307">
                 <a:solidFill>
                   <a:srgbClr val="A6A6A6"/>
                 </a:solidFill>
@@ -9747,7 +9767,7 @@
                 <a:cs typeface="Handyman"/>
                 <a:sym typeface="Handyman"/>
               </a:rPr>
-              <a:t>Widget de localização: ao clicar nele, cria um link do Google Maps e abre o WhatsApp para enviar ele para quem a usuária quiser!</a:t>
+              <a:t>Widget de SOS: ao clicar nele, abre o app de telefone já discado no 180!</a:t>
             </a:r>
           </a:p>
         </p:txBody>
@@ -10035,8 +10055,8 @@
         </p:nvSpPr>
         <p:spPr>
           <a:xfrm rot="0">
-            <a:off x="2480681" y="5486409"/>
-            <a:ext cx="13326637" cy="3771891"/>
+            <a:off x="2480681" y="4258475"/>
+            <a:ext cx="13326637" cy="4999825"/>
           </a:xfrm>
           <a:prstGeom prst="rect">
             <a:avLst/>
@@ -10066,7 +10086,7 @@
                 <a:cs typeface="Handyman"/>
                 <a:sym typeface="Handyman"/>
               </a:rPr>
-              <a:t>Widget de palmas: ao clicar, abre o app onde existe a proteção por barulho/palmas</a:t>
+              <a:t>Widget de localização: ao clicar nele, cria um link do Google Maps e abre o WhatsApp para enviar ele para quem a usuária quiser!</a:t>
             </a:r>
           </a:p>
         </p:txBody>
@@ -10630,7 +10650,7 @@
         <p:spPr>
           <a:xfrm rot="0">
             <a:off x="4308945" y="704850"/>
-            <a:ext cx="9670110" cy="1554931"/>
+            <a:ext cx="9670110" cy="2995557"/>
           </a:xfrm>
           <a:prstGeom prst="rect">
             <a:avLst/>
@@ -10660,7 +10680,7 @@
                 <a:cs typeface="Handyman"/>
                 <a:sym typeface="Handyman"/>
               </a:rPr>
-              <a:t>Nota:</a:t>
+              <a:t>Quais são as funções do app?</a:t>
             </a:r>
           </a:p>
         </p:txBody>
@@ -10673,8 +10693,8 @@
         </p:nvSpPr>
         <p:spPr>
           <a:xfrm rot="0">
-            <a:off x="2480681" y="4258475"/>
-            <a:ext cx="13326637" cy="4999825"/>
+            <a:off x="2480681" y="5486409"/>
+            <a:ext cx="13326637" cy="3771891"/>
           </a:xfrm>
           <a:prstGeom prst="rect">
             <a:avLst/>
@@ -10704,7 +10724,7 @@
                 <a:cs typeface="Handyman"/>
                 <a:sym typeface="Handyman"/>
               </a:rPr>
-              <a:t>O serviço de proteção por Barulho e o de chacaolhar o telefone funcionam mesmo com a tela bloqueada!</a:t>
+              <a:t>Widget de palmas: ao clicar, abre o app onde existe a proteção por barulho/palmas</a:t>
             </a:r>
           </a:p>
         </p:txBody>
@@ -10721,6 +10741,325 @@
 </file>
 
 <file path=ppt/slides/slide31.xml><?xml version="1.0" encoding="utf-8"?>
+<p:sld xmlns:p="http://schemas.openxmlformats.org/presentationml/2006/main" xmlns:a="http://schemas.openxmlformats.org/drawingml/2006/main" xmlns:r="http://schemas.openxmlformats.org/officeDocument/2006/relationships">
+  <p:cSld>
+    <p:spTree>
+      <p:nvGrpSpPr>
+        <p:cNvPr id="1" name=""/>
+        <p:cNvGrpSpPr/>
+        <p:nvPr/>
+      </p:nvGrpSpPr>
+      <p:grpSpPr>
+        <a:xfrm>
+          <a:off x="0" y="0"/>
+          <a:ext cx="0" cy="0"/>
+          <a:chOff x="0" y="0"/>
+          <a:chExt cx="0" cy="0"/>
+        </a:xfrm>
+      </p:grpSpPr>
+      <p:grpSp>
+        <p:nvGrpSpPr>
+          <p:cNvPr name="Group 2" id="2"/>
+          <p:cNvGrpSpPr/>
+          <p:nvPr/>
+        </p:nvGrpSpPr>
+        <p:grpSpPr>
+          <a:xfrm rot="0">
+            <a:off x="572449" y="669078"/>
+            <a:ext cx="2412630" cy="1326234"/>
+            <a:chOff x="0" y="0"/>
+            <a:chExt cx="2454071" cy="1349024"/>
+          </a:xfrm>
+        </p:grpSpPr>
+        <p:sp>
+          <p:nvSpPr>
+            <p:cNvPr name="Freeform 3" id="3"/>
+            <p:cNvSpPr/>
+            <p:nvPr/>
+          </p:nvSpPr>
+          <p:spPr>
+            <a:xfrm flipH="false" flipV="false" rot="0">
+              <a:off x="0" y="0"/>
+              <a:ext cx="2454071" cy="1349024"/>
+            </a:xfrm>
+            <a:custGeom>
+              <a:avLst/>
+              <a:gdLst/>
+              <a:ahLst/>
+              <a:cxnLst/>
+              <a:rect r="r" b="b" t="t" l="l"/>
+              <a:pathLst>
+                <a:path h="1349024" w="2454071">
+                  <a:moveTo>
+                    <a:pt x="2454071" y="674512"/>
+                  </a:moveTo>
+                  <a:lnTo>
+                    <a:pt x="2454071" y="674512"/>
+                  </a:lnTo>
+                  <a:cubicBezTo>
+                    <a:pt x="2454071" y="1047035"/>
+                    <a:pt x="2152081" y="1349024"/>
+                    <a:pt x="1779559" y="1349024"/>
+                  </a:cubicBezTo>
+                  <a:lnTo>
+                    <a:pt x="674512" y="1349024"/>
+                  </a:lnTo>
+                  <a:cubicBezTo>
+                    <a:pt x="301989" y="1349024"/>
+                    <a:pt x="0" y="1047035"/>
+                    <a:pt x="0" y="674512"/>
+                  </a:cubicBezTo>
+                  <a:lnTo>
+                    <a:pt x="0" y="674512"/>
+                  </a:lnTo>
+                  <a:cubicBezTo>
+                    <a:pt x="0" y="301989"/>
+                    <a:pt x="301989" y="0"/>
+                    <a:pt x="674512" y="0"/>
+                  </a:cubicBezTo>
+                  <a:lnTo>
+                    <a:pt x="1779559" y="0"/>
+                  </a:lnTo>
+                  <a:cubicBezTo>
+                    <a:pt x="1958450" y="0"/>
+                    <a:pt x="2130015" y="71064"/>
+                    <a:pt x="2256511" y="197560"/>
+                  </a:cubicBezTo>
+                  <a:cubicBezTo>
+                    <a:pt x="2383006" y="324056"/>
+                    <a:pt x="2454071" y="495620"/>
+                    <a:pt x="2454071" y="674512"/>
+                  </a:cubicBezTo>
+                  <a:close/>
+                </a:path>
+              </a:pathLst>
+            </a:custGeom>
+            <a:solidFill>
+              <a:srgbClr val="FFC9C9"/>
+            </a:solidFill>
+          </p:spPr>
+        </p:sp>
+        <p:sp>
+          <p:nvSpPr>
+            <p:cNvPr name="TextBox 4" id="4"/>
+            <p:cNvSpPr txBox="true"/>
+            <p:nvPr/>
+          </p:nvSpPr>
+          <p:spPr>
+            <a:xfrm>
+              <a:off x="0" y="-38100"/>
+              <a:ext cx="2454071" cy="1387124"/>
+            </a:xfrm>
+            <a:prstGeom prst="rect">
+              <a:avLst/>
+            </a:prstGeom>
+          </p:spPr>
+          <p:txBody>
+            <a:bodyPr anchor="ctr" rtlCol="false" tIns="50800" lIns="50800" bIns="50800" rIns="50800"/>
+            <a:lstStyle/>
+            <a:p>
+              <a:pPr algn="ctr">
+                <a:lnSpc>
+                  <a:spcPts val="2659"/>
+                </a:lnSpc>
+                <a:spcBef>
+                  <a:spcPct val="0"/>
+                </a:spcBef>
+              </a:pPr>
+            </a:p>
+          </p:txBody>
+        </p:sp>
+      </p:grpSp>
+      <p:sp>
+        <p:nvSpPr>
+          <p:cNvPr name="Freeform 5" id="5"/>
+          <p:cNvSpPr/>
+          <p:nvPr/>
+        </p:nvSpPr>
+        <p:spPr>
+          <a:xfrm flipH="false" flipV="false" rot="0">
+            <a:off x="789916" y="881046"/>
+            <a:ext cx="902299" cy="902299"/>
+          </a:xfrm>
+          <a:custGeom>
+            <a:avLst/>
+            <a:gdLst/>
+            <a:ahLst/>
+            <a:cxnLst/>
+            <a:rect r="r" b="b" t="t" l="l"/>
+            <a:pathLst>
+              <a:path h="902299" w="902299">
+                <a:moveTo>
+                  <a:pt x="0" y="0"/>
+                </a:moveTo>
+                <a:lnTo>
+                  <a:pt x="902299" y="0"/>
+                </a:lnTo>
+                <a:lnTo>
+                  <a:pt x="902299" y="902299"/>
+                </a:lnTo>
+                <a:lnTo>
+                  <a:pt x="0" y="902299"/>
+                </a:lnTo>
+                <a:lnTo>
+                  <a:pt x="0" y="0"/>
+                </a:lnTo>
+                <a:close/>
+              </a:path>
+            </a:pathLst>
+          </a:custGeom>
+          <a:blipFill>
+            <a:blip r:embed="rId2"/>
+            <a:stretch>
+              <a:fillRect l="0" t="0" r="0" b="0"/>
+            </a:stretch>
+          </a:blipFill>
+        </p:spPr>
+      </p:sp>
+      <p:sp>
+        <p:nvSpPr>
+          <p:cNvPr name="TextBox 6" id="6"/>
+          <p:cNvSpPr txBox="true"/>
+          <p:nvPr/>
+        </p:nvSpPr>
+        <p:spPr>
+          <a:xfrm rot="0">
+            <a:off x="2003964" y="759317"/>
+            <a:ext cx="476717" cy="945731"/>
+          </a:xfrm>
+          <a:prstGeom prst="rect">
+            <a:avLst/>
+          </a:prstGeom>
+        </p:spPr>
+        <p:txBody>
+          <a:bodyPr anchor="t" rtlCol="false" tIns="0" lIns="0" bIns="0" rIns="0">
+            <a:spAutoFit/>
+          </a:bodyPr>
+          <a:lstStyle/>
+          <a:p>
+            <a:pPr algn="ctr" marL="0" indent="0" lvl="0">
+              <a:lnSpc>
+                <a:spcPts val="6996"/>
+              </a:lnSpc>
+              <a:spcBef>
+                <a:spcPct val="0"/>
+              </a:spcBef>
+            </a:pPr>
+            <a:r>
+              <a:rPr lang="en-US" sz="4997">
+                <a:solidFill>
+                  <a:srgbClr val="F88888"/>
+                </a:solidFill>
+                <a:latin typeface="Handyman"/>
+                <a:ea typeface="Handyman"/>
+                <a:cs typeface="Handyman"/>
+                <a:sym typeface="Handyman"/>
+              </a:rPr>
+              <a:t>M</a:t>
+            </a:r>
+          </a:p>
+        </p:txBody>
+      </p:sp>
+      <p:sp>
+        <p:nvSpPr>
+          <p:cNvPr name="TextBox 7" id="7"/>
+          <p:cNvSpPr txBox="true"/>
+          <p:nvPr/>
+        </p:nvSpPr>
+        <p:spPr>
+          <a:xfrm rot="0">
+            <a:off x="4308945" y="704850"/>
+            <a:ext cx="9670110" cy="1554931"/>
+          </a:xfrm>
+          <a:prstGeom prst="rect">
+            <a:avLst/>
+          </a:prstGeom>
+        </p:spPr>
+        <p:txBody>
+          <a:bodyPr anchor="t" rtlCol="false" tIns="0" lIns="0" bIns="0" rIns="0">
+            <a:spAutoFit/>
+          </a:bodyPr>
+          <a:lstStyle/>
+          <a:p>
+            <a:pPr algn="ctr" marL="0" indent="0" lvl="0">
+              <a:lnSpc>
+                <a:spcPts val="11549"/>
+              </a:lnSpc>
+              <a:spcBef>
+                <a:spcPct val="0"/>
+              </a:spcBef>
+            </a:pPr>
+            <a:r>
+              <a:rPr lang="en-US" sz="8249">
+                <a:solidFill>
+                  <a:srgbClr val="000000"/>
+                </a:solidFill>
+                <a:latin typeface="Handyman"/>
+                <a:ea typeface="Handyman"/>
+                <a:cs typeface="Handyman"/>
+                <a:sym typeface="Handyman"/>
+              </a:rPr>
+              <a:t>Nota:</a:t>
+            </a:r>
+          </a:p>
+        </p:txBody>
+      </p:sp>
+      <p:sp>
+        <p:nvSpPr>
+          <p:cNvPr name="TextBox 8" id="8"/>
+          <p:cNvSpPr txBox="true"/>
+          <p:nvPr/>
+        </p:nvSpPr>
+        <p:spPr>
+          <a:xfrm rot="0">
+            <a:off x="2480681" y="4258475"/>
+            <a:ext cx="13326637" cy="4999825"/>
+          </a:xfrm>
+          <a:prstGeom prst="rect">
+            <a:avLst/>
+          </a:prstGeom>
+        </p:spPr>
+        <p:txBody>
+          <a:bodyPr anchor="t" rtlCol="false" tIns="0" lIns="0" bIns="0" rIns="0">
+            <a:spAutoFit/>
+          </a:bodyPr>
+          <a:lstStyle/>
+          <a:p>
+            <a:pPr algn="ctr" marL="0" indent="0" lvl="0">
+              <a:lnSpc>
+                <a:spcPts val="9844"/>
+              </a:lnSpc>
+              <a:spcBef>
+                <a:spcPct val="0"/>
+              </a:spcBef>
+            </a:pPr>
+            <a:r>
+              <a:rPr lang="en-US" sz="7031">
+                <a:solidFill>
+                  <a:srgbClr val="A6A6A6"/>
+                </a:solidFill>
+                <a:latin typeface="Handyman"/>
+                <a:ea typeface="Handyman"/>
+                <a:cs typeface="Handyman"/>
+                <a:sym typeface="Handyman"/>
+              </a:rPr>
+              <a:t>O serviço de proteção por Barulho e o de chacaolhar o telefone funcionam mesmo com a tela bloqueada!</a:t>
+            </a:r>
+          </a:p>
+        </p:txBody>
+      </p:sp>
+    </p:spTree>
+  </p:cSld>
+  <p:clrMapOvr>
+    <a:masterClrMapping/>
+  </p:clrMapOvr>
+  <p:transition spd="slow">
+    <p:push dir="l"/>
+  </p:transition>
+</p:sld>
+</file>
+
+<file path=ppt/slides/slide32.xml><?xml version="1.0" encoding="utf-8"?>
 <p:sld xmlns:p="http://schemas.openxmlformats.org/presentationml/2006/main" xmlns:a="http://schemas.openxmlformats.org/drawingml/2006/main" xmlns:r="http://schemas.openxmlformats.org/officeDocument/2006/relationships">
   <p:cSld>
     <p:spTree>

--- a/material2.pptx
+++ b/material2.pptx
@@ -9060,8 +9060,8 @@
         </p:nvSpPr>
         <p:spPr>
           <a:xfrm rot="0">
-            <a:off x="1778763" y="5892107"/>
-            <a:ext cx="15222657" cy="3366193"/>
+            <a:off x="4198313" y="6351778"/>
+            <a:ext cx="9891375" cy="2906522"/>
           </a:xfrm>
           <a:prstGeom prst="rect">
             <a:avLst/>
@@ -9073,13 +9073,16 @@
           </a:bodyPr>
           <a:lstStyle/>
           <a:p>
-            <a:pPr algn="ctr">
+            <a:pPr algn="ctr" marL="0" indent="0" lvl="0">
               <a:lnSpc>
-                <a:spcPts val="8785"/>
+                <a:spcPts val="5708"/>
               </a:lnSpc>
+              <a:spcBef>
+                <a:spcPct val="0"/>
+              </a:spcBef>
             </a:pPr>
             <a:r>
-              <a:rPr lang="en-US" sz="6275">
+              <a:rPr lang="en-US" sz="4077">
                 <a:solidFill>
                   <a:srgbClr val="A6A6A6"/>
                 </a:solidFill>
@@ -9088,20 +9091,10 @@
                 <a:cs typeface="Handyman"/>
                 <a:sym typeface="Handyman"/>
               </a:rPr>
-              <a:t>Escolher ícone do app:</a:t>
-            </a:r>
-          </a:p>
-          <a:p>
-            <a:pPr algn="ctr" marL="0" indent="0" lvl="0">
-              <a:lnSpc>
-                <a:spcPts val="8785"/>
-              </a:lnSpc>
-              <a:spcBef>
-                <a:spcPct val="0"/>
-              </a:spcBef>
-            </a:pPr>
-            <a:r>
-              <a:rPr lang="en-US" sz="6275">
+              <a:t>Escolher ícone do app: </a:t>
+            </a:r>
+            <a:r>
+              <a:rPr lang="en-US" sz="4077">
                 <a:solidFill>
                   <a:srgbClr val="A6A6A6"/>
                 </a:solidFill>
@@ -9110,7 +9103,7 @@
                 <a:cs typeface="Handyman"/>
                 <a:sym typeface="Handyman"/>
               </a:rPr>
-              <a:t>Essa função abre uma acitvity e poderá trocar o ícone do app!</a:t>
+              <a:t>Essa função abre uma acitvity (tela) e poderá trocar o ícone do app!, até mesmo para um ícone de calculadora, disfarçando o ap</a:t>
             </a:r>
           </a:p>
         </p:txBody>

--- a/material2.pptx
+++ b/material2.pptx
@@ -37,13 +37,14 @@
     <p:sldId id="285" r:id="rId35"/>
     <p:sldId id="286" r:id="rId36"/>
     <p:sldId id="287" r:id="rId37"/>
+    <p:sldId id="288" r:id="rId38"/>
   </p:sldIdLst>
   <p:sldSz cx="18288000" cy="10287000"/>
   <p:notesSz cx="6858000" cy="9144000"/>
   <p:embeddedFontLst>
     <p:embeddedFont>
       <p:font typeface="Handyman" charset="1" panose="00000000000000000000"/>
-      <p:regular r:id="rId38"/>
+      <p:regular r:id="rId39"/>
     </p:embeddedFont>
   </p:embeddedFontLst>
   <p:defaultTextStyle>
@@ -3618,7 +3619,7 @@
         </p:nvSpPr>
         <p:spPr>
           <a:xfrm rot="0">
-            <a:off x="1778763" y="4185133"/>
+            <a:off x="2003964" y="4185133"/>
             <a:ext cx="14280071" cy="5073167"/>
           </a:xfrm>
           <a:prstGeom prst="rect">
@@ -9391,8 +9392,8 @@
         </p:nvSpPr>
         <p:spPr>
           <a:xfrm rot="0">
-            <a:off x="2480681" y="4964815"/>
-            <a:ext cx="13818821" cy="4293485"/>
+            <a:off x="2985078" y="5639737"/>
+            <a:ext cx="12317844" cy="3618563"/>
           </a:xfrm>
           <a:prstGeom prst="rect">
             <a:avLst/>
@@ -9404,13 +9405,16 @@
           </a:bodyPr>
           <a:lstStyle/>
           <a:p>
-            <a:pPr algn="ctr">
+            <a:pPr algn="ctr" marL="0" indent="0" lvl="0">
               <a:lnSpc>
-                <a:spcPts val="16584"/>
+                <a:spcPts val="5708"/>
               </a:lnSpc>
+              <a:spcBef>
+                <a:spcPct val="0"/>
+              </a:spcBef>
             </a:pPr>
             <a:r>
-              <a:rPr lang="en-US" sz="11845">
+              <a:rPr lang="en-US" sz="4077">
                 <a:solidFill>
                   <a:srgbClr val="A6A6A6"/>
                 </a:solidFill>
@@ -9419,29 +9423,7 @@
                 <a:cs typeface="Handyman"/>
                 <a:sym typeface="Handyman"/>
               </a:rPr>
-              <a:t>Saindo do app, </a:t>
-            </a:r>
-          </a:p>
-          <a:p>
-            <a:pPr algn="ctr" marL="0" indent="0" lvl="0">
-              <a:lnSpc>
-                <a:spcPts val="16584"/>
-              </a:lnSpc>
-              <a:spcBef>
-                <a:spcPct val="0"/>
-              </a:spcBef>
-            </a:pPr>
-            <a:r>
-              <a:rPr lang="en-US" sz="11845">
-                <a:solidFill>
-                  <a:srgbClr val="A6A6A6"/>
-                </a:solidFill>
-                <a:latin typeface="Handyman"/>
-                <a:ea typeface="Handyman"/>
-                <a:cs typeface="Handyman"/>
-                <a:sym typeface="Handyman"/>
-              </a:rPr>
-              <a:t>temos...</a:t>
+              <a:t>Desligar o celular: Ao tocar neste botão, o aplicativo solicitará a permissão de Administrador do dispositivo, caso ela ainda não tenha sido concedida. Quando essa permissão estiver ativa, o aplicativo poderá bloquear imediatamente a tela do dispositivo.</a:t>
             </a:r>
           </a:p>
         </p:txBody>
@@ -9729,8 +9711,8 @@
         </p:nvSpPr>
         <p:spPr>
           <a:xfrm rot="0">
-            <a:off x="2172298" y="4256753"/>
-            <a:ext cx="13943405" cy="5001547"/>
+            <a:off x="2480681" y="4964815"/>
+            <a:ext cx="13818821" cy="4293485"/>
           </a:xfrm>
           <a:prstGeom prst="rect">
             <a:avLst/>
@@ -9742,16 +9724,13 @@
           </a:bodyPr>
           <a:lstStyle/>
           <a:p>
-            <a:pPr algn="ctr" marL="0" indent="0" lvl="0">
+            <a:pPr algn="ctr">
               <a:lnSpc>
-                <a:spcPts val="13030"/>
+                <a:spcPts val="16584"/>
               </a:lnSpc>
-              <a:spcBef>
-                <a:spcPct val="0"/>
-              </a:spcBef>
             </a:pPr>
             <a:r>
-              <a:rPr lang="en-US" sz="9307">
+              <a:rPr lang="en-US" sz="11845">
                 <a:solidFill>
                   <a:srgbClr val="A6A6A6"/>
                 </a:solidFill>
@@ -9760,7 +9739,29 @@
                 <a:cs typeface="Handyman"/>
                 <a:sym typeface="Handyman"/>
               </a:rPr>
-              <a:t>Widget de SOS: ao clicar nele, abre o app de telefone já discado no 180!</a:t>
+              <a:t>Saindo do app, </a:t>
+            </a:r>
+          </a:p>
+          <a:p>
+            <a:pPr algn="ctr" marL="0" indent="0" lvl="0">
+              <a:lnSpc>
+                <a:spcPts val="16584"/>
+              </a:lnSpc>
+              <a:spcBef>
+                <a:spcPct val="0"/>
+              </a:spcBef>
+            </a:pPr>
+            <a:r>
+              <a:rPr lang="en-US" sz="11845">
+                <a:solidFill>
+                  <a:srgbClr val="A6A6A6"/>
+                </a:solidFill>
+                <a:latin typeface="Handyman"/>
+                <a:ea typeface="Handyman"/>
+                <a:cs typeface="Handyman"/>
+                <a:sym typeface="Handyman"/>
+              </a:rPr>
+              <a:t>temos...</a:t>
             </a:r>
           </a:p>
         </p:txBody>
@@ -10048,8 +10049,8 @@
         </p:nvSpPr>
         <p:spPr>
           <a:xfrm rot="0">
-            <a:off x="2480681" y="4258475"/>
-            <a:ext cx="13326637" cy="4999825"/>
+            <a:off x="2172298" y="4256753"/>
+            <a:ext cx="13943405" cy="5001547"/>
           </a:xfrm>
           <a:prstGeom prst="rect">
             <a:avLst/>
@@ -10063,14 +10064,14 @@
           <a:p>
             <a:pPr algn="ctr" marL="0" indent="0" lvl="0">
               <a:lnSpc>
-                <a:spcPts val="9844"/>
+                <a:spcPts val="13030"/>
               </a:lnSpc>
               <a:spcBef>
                 <a:spcPct val="0"/>
               </a:spcBef>
             </a:pPr>
             <a:r>
-              <a:rPr lang="en-US" sz="7031">
+              <a:rPr lang="en-US" sz="9307">
                 <a:solidFill>
                   <a:srgbClr val="A6A6A6"/>
                 </a:solidFill>
@@ -10079,7 +10080,7 @@
                 <a:cs typeface="Handyman"/>
                 <a:sym typeface="Handyman"/>
               </a:rPr>
-              <a:t>Widget de localização: ao clicar nele, cria um link do Google Maps e abre o WhatsApp para enviar ele para quem a usuária quiser!</a:t>
+              <a:t>Widget de SOS: ao clicar nele, abre o app de telefone já discado no 180!</a:t>
             </a:r>
           </a:p>
         </p:txBody>
@@ -10686,8 +10687,8 @@
         </p:nvSpPr>
         <p:spPr>
           <a:xfrm rot="0">
-            <a:off x="2480681" y="5486409"/>
-            <a:ext cx="13326637" cy="3771891"/>
+            <a:off x="2480681" y="4258475"/>
+            <a:ext cx="13326637" cy="4999825"/>
           </a:xfrm>
           <a:prstGeom prst="rect">
             <a:avLst/>
@@ -10717,7 +10718,7 @@
                 <a:cs typeface="Handyman"/>
                 <a:sym typeface="Handyman"/>
               </a:rPr>
-              <a:t>Widget de palmas: ao clicar, abre o app onde existe a proteção por barulho/palmas</a:t>
+              <a:t>Widget de localização: ao clicar nele, cria um link do Google Maps e abre o WhatsApp para enviar ele para quem a usuária quiser!</a:t>
             </a:r>
           </a:p>
         </p:txBody>
@@ -10962,7 +10963,7 @@
         <p:spPr>
           <a:xfrm rot="0">
             <a:off x="4308945" y="704850"/>
-            <a:ext cx="9670110" cy="1554931"/>
+            <a:ext cx="9670110" cy="2995557"/>
           </a:xfrm>
           <a:prstGeom prst="rect">
             <a:avLst/>
@@ -10992,7 +10993,7 @@
                 <a:cs typeface="Handyman"/>
                 <a:sym typeface="Handyman"/>
               </a:rPr>
-              <a:t>Nota:</a:t>
+              <a:t>Quais são as funções do app?</a:t>
             </a:r>
           </a:p>
         </p:txBody>
@@ -11005,8 +11006,8 @@
         </p:nvSpPr>
         <p:spPr>
           <a:xfrm rot="0">
-            <a:off x="2480681" y="4258475"/>
-            <a:ext cx="13326637" cy="4999825"/>
+            <a:off x="2480681" y="5486409"/>
+            <a:ext cx="13326637" cy="3771891"/>
           </a:xfrm>
           <a:prstGeom prst="rect">
             <a:avLst/>
@@ -11036,7 +11037,7 @@
                 <a:cs typeface="Handyman"/>
                 <a:sym typeface="Handyman"/>
               </a:rPr>
-              <a:t>O serviço de proteção por Barulho e o de chacaolhar o telefone funcionam mesmo com a tela bloqueada!</a:t>
+              <a:t>Widget de palmas: ao clicar, abre o app onde existe a proteção por barulho/palmas</a:t>
             </a:r>
           </a:p>
         </p:txBody>
@@ -11280,8 +11281,8 @@
         </p:nvSpPr>
         <p:spPr>
           <a:xfrm rot="0">
-            <a:off x="0" y="1815507"/>
-            <a:ext cx="19471325" cy="6017811"/>
+            <a:off x="4308945" y="704850"/>
+            <a:ext cx="9670110" cy="1554931"/>
           </a:xfrm>
           <a:prstGeom prst="rect">
             <a:avLst/>
@@ -11295,14 +11296,14 @@
           <a:p>
             <a:pPr algn="ctr" marL="0" indent="0" lvl="0">
               <a:lnSpc>
-                <a:spcPts val="23256"/>
+                <a:spcPts val="11549"/>
               </a:lnSpc>
               <a:spcBef>
                 <a:spcPct val="0"/>
               </a:spcBef>
             </a:pPr>
             <a:r>
-              <a:rPr lang="en-US" sz="16611">
+              <a:rPr lang="en-US" sz="8249">
                 <a:solidFill>
                   <a:srgbClr val="000000"/>
                 </a:solidFill>
@@ -11311,7 +11312,51 @@
                 <a:cs typeface="Handyman"/>
                 <a:sym typeface="Handyman"/>
               </a:rPr>
-              <a:t>Obrigado por ler/assistir!</a:t>
+              <a:t>Nota:</a:t>
+            </a:r>
+          </a:p>
+        </p:txBody>
+      </p:sp>
+      <p:sp>
+        <p:nvSpPr>
+          <p:cNvPr name="TextBox 8" id="8"/>
+          <p:cNvSpPr txBox="true"/>
+          <p:nvPr/>
+        </p:nvSpPr>
+        <p:spPr>
+          <a:xfrm rot="0">
+            <a:off x="2480681" y="4258475"/>
+            <a:ext cx="13326637" cy="4999825"/>
+          </a:xfrm>
+          <a:prstGeom prst="rect">
+            <a:avLst/>
+          </a:prstGeom>
+        </p:spPr>
+        <p:txBody>
+          <a:bodyPr anchor="t" rtlCol="false" tIns="0" lIns="0" bIns="0" rIns="0">
+            <a:spAutoFit/>
+          </a:bodyPr>
+          <a:lstStyle/>
+          <a:p>
+            <a:pPr algn="ctr" marL="0" indent="0" lvl="0">
+              <a:lnSpc>
+                <a:spcPts val="9844"/>
+              </a:lnSpc>
+              <a:spcBef>
+                <a:spcPct val="0"/>
+              </a:spcBef>
+            </a:pPr>
+            <a:r>
+              <a:rPr lang="en-US" sz="7031">
+                <a:solidFill>
+                  <a:srgbClr val="A6A6A6"/>
+                </a:solidFill>
+                <a:latin typeface="Handyman"/>
+                <a:ea typeface="Handyman"/>
+                <a:cs typeface="Handyman"/>
+                <a:sym typeface="Handyman"/>
+              </a:rPr>
+              <a:t>O serviço de proteção por Barulho e o de chacaolhar o telefone funcionam mesmo com a tela bloqueada!</a:t>
             </a:r>
           </a:p>
         </p:txBody>
@@ -11327,7 +11372,7 @@
 </p:sld>
 </file>
 
-<file path=ppt/slides/slide4.xml><?xml version="1.0" encoding="utf-8"?>
+<file path=ppt/slides/slide33.xml><?xml version="1.0" encoding="utf-8"?>
 <p:sld xmlns:p="http://schemas.openxmlformats.org/presentationml/2006/main" xmlns:a="http://schemas.openxmlformats.org/drawingml/2006/main" xmlns:r="http://schemas.openxmlformats.org/officeDocument/2006/relationships">
   <p:cSld>
     <p:spTree>
@@ -11555,8 +11600,8 @@
         </p:nvSpPr>
         <p:spPr>
           <a:xfrm rot="0">
-            <a:off x="4308945" y="704850"/>
-            <a:ext cx="9670110" cy="2995557"/>
+            <a:off x="0" y="1815507"/>
+            <a:ext cx="19471325" cy="6017811"/>
           </a:xfrm>
           <a:prstGeom prst="rect">
             <a:avLst/>
@@ -11570,14 +11615,14 @@
           <a:p>
             <a:pPr algn="ctr" marL="0" indent="0" lvl="0">
               <a:lnSpc>
-                <a:spcPts val="11549"/>
+                <a:spcPts val="23256"/>
               </a:lnSpc>
               <a:spcBef>
                 <a:spcPct val="0"/>
               </a:spcBef>
             </a:pPr>
             <a:r>
-              <a:rPr lang="en-US" sz="8249">
+              <a:rPr lang="en-US" sz="16611">
                 <a:solidFill>
                   <a:srgbClr val="000000"/>
                 </a:solidFill>
@@ -11586,70 +11631,7 @@
                 <a:cs typeface="Handyman"/>
                 <a:sym typeface="Handyman"/>
               </a:rPr>
-              <a:t>Quais são as permissões do app?</a:t>
-            </a:r>
-          </a:p>
-        </p:txBody>
-      </p:sp>
-      <p:sp>
-        <p:nvSpPr>
-          <p:cNvPr name="TextBox 8" id="8"/>
-          <p:cNvSpPr txBox="true"/>
-          <p:nvPr/>
-        </p:nvSpPr>
-        <p:spPr>
-          <a:xfrm rot="0">
-            <a:off x="3942182" y="4968569"/>
-            <a:ext cx="10403637" cy="4289731"/>
-          </a:xfrm>
-          <a:prstGeom prst="rect">
-            <a:avLst/>
-          </a:prstGeom>
-        </p:spPr>
-        <p:txBody>
-          <a:bodyPr anchor="t" rtlCol="false" tIns="0" lIns="0" bIns="0" rIns="0">
-            <a:spAutoFit/>
-          </a:bodyPr>
-          <a:lstStyle/>
-          <a:p>
-            <a:pPr algn="ctr">
-              <a:lnSpc>
-                <a:spcPts val="6769"/>
-              </a:lnSpc>
-            </a:pPr>
-            <a:r>
-              <a:rPr lang="en-US" sz="4835">
-                <a:solidFill>
-                  <a:srgbClr val="A6A6A6"/>
-                </a:solidFill>
-                <a:latin typeface="Handyman"/>
-                <a:ea typeface="Handyman"/>
-                <a:cs typeface="Handyman"/>
-                <a:sym typeface="Handyman"/>
-              </a:rPr>
-              <a:t>Contatos, microfone, sms, telefone, acesso a todos os arquivos e localização </a:t>
-            </a:r>
-          </a:p>
-          <a:p>
-            <a:pPr algn="ctr" marL="0" indent="0" lvl="0">
-              <a:lnSpc>
-                <a:spcPts val="6769"/>
-              </a:lnSpc>
-              <a:spcBef>
-                <a:spcPct val="0"/>
-              </a:spcBef>
-            </a:pPr>
-            <a:r>
-              <a:rPr lang="en-US" sz="4835">
-                <a:solidFill>
-                  <a:srgbClr val="A6A6A6"/>
-                </a:solidFill>
-                <a:latin typeface="Handyman"/>
-                <a:ea typeface="Handyman"/>
-                <a:cs typeface="Handyman"/>
-                <a:sym typeface="Handyman"/>
-              </a:rPr>
-              <a:t>E o app não quebra ao negar essas permissões, EXCETO NA FUNÇÃO DE PROTEÇÃO POR PALMAS!</a:t>
+              <a:t>Obrigado por ler/assistir!</a:t>
             </a:r>
           </a:p>
         </p:txBody>
@@ -11665,7 +11647,7 @@
 </p:sld>
 </file>
 
-<file path=ppt/slides/slide5.xml><?xml version="1.0" encoding="utf-8"?>
+<file path=ppt/slides/slide4.xml><?xml version="1.0" encoding="utf-8"?>
 <p:sld xmlns:p="http://schemas.openxmlformats.org/presentationml/2006/main" xmlns:a="http://schemas.openxmlformats.org/drawingml/2006/main" xmlns:r="http://schemas.openxmlformats.org/officeDocument/2006/relationships">
   <p:cSld>
     <p:spTree>
@@ -11894,7 +11876,7 @@
         <p:spPr>
           <a:xfrm rot="0">
             <a:off x="4308945" y="704850"/>
-            <a:ext cx="9670110" cy="1554931"/>
+            <a:ext cx="9670110" cy="2995557"/>
           </a:xfrm>
           <a:prstGeom prst="rect">
             <a:avLst/>
@@ -11924,7 +11906,7 @@
                 <a:cs typeface="Handyman"/>
                 <a:sym typeface="Handyman"/>
               </a:rPr>
-              <a:t>Saibam que:</a:t>
+              <a:t>Quais são as permissões do app?</a:t>
             </a:r>
           </a:p>
         </p:txBody>
@@ -11937,8 +11919,8 @@
         </p:nvSpPr>
         <p:spPr>
           <a:xfrm rot="0">
-            <a:off x="2985078" y="3829749"/>
-            <a:ext cx="12490940" cy="3856595"/>
+            <a:off x="3942182" y="4124158"/>
+            <a:ext cx="10403637" cy="4289731"/>
           </a:xfrm>
           <a:prstGeom prst="rect">
             <a:avLst/>
@@ -11950,16 +11932,13 @@
           </a:bodyPr>
           <a:lstStyle/>
           <a:p>
-            <a:pPr algn="ctr" marL="0" indent="0" lvl="0">
+            <a:pPr algn="ctr">
               <a:lnSpc>
-                <a:spcPts val="10055"/>
+                <a:spcPts val="6769"/>
               </a:lnSpc>
-              <a:spcBef>
-                <a:spcPct val="0"/>
-              </a:spcBef>
             </a:pPr>
             <a:r>
-              <a:rPr lang="en-US" sz="7182">
+              <a:rPr lang="en-US" sz="4835">
                 <a:solidFill>
                   <a:srgbClr val="A6A6A6"/>
                 </a:solidFill>
@@ -11968,7 +11947,29 @@
                 <a:cs typeface="Handyman"/>
                 <a:sym typeface="Handyman"/>
               </a:rPr>
-              <a:t>O 180, central de atendimento a mulher, tem um número de WhatsApp, e até e-mail!</a:t>
+              <a:t>Contatos, microfone, sms, telefone, acesso a todos os arquivos, administrador do dispositivo e localização </a:t>
+            </a:r>
+          </a:p>
+          <a:p>
+            <a:pPr algn="ctr" marL="0" indent="0" lvl="0">
+              <a:lnSpc>
+                <a:spcPts val="6769"/>
+              </a:lnSpc>
+              <a:spcBef>
+                <a:spcPct val="0"/>
+              </a:spcBef>
+            </a:pPr>
+            <a:r>
+              <a:rPr lang="en-US" sz="4835">
+                <a:solidFill>
+                  <a:srgbClr val="A6A6A6"/>
+                </a:solidFill>
+                <a:latin typeface="Handyman"/>
+                <a:ea typeface="Handyman"/>
+                <a:cs typeface="Handyman"/>
+                <a:sym typeface="Handyman"/>
+              </a:rPr>
+              <a:t>E o app não quebra ao negar essas permissões...</a:t>
             </a:r>
           </a:p>
         </p:txBody>
@@ -11984,7 +11985,7 @@
 </p:sld>
 </file>
 
-<file path=ppt/slides/slide6.xml><?xml version="1.0" encoding="utf-8"?>
+<file path=ppt/slides/slide5.xml><?xml version="1.0" encoding="utf-8"?>
 <p:sld xmlns:p="http://schemas.openxmlformats.org/presentationml/2006/main" xmlns:a="http://schemas.openxmlformats.org/drawingml/2006/main" xmlns:r="http://schemas.openxmlformats.org/officeDocument/2006/relationships">
   <p:cSld>
     <p:spTree>
@@ -12213,7 +12214,7 @@
         <p:spPr>
           <a:xfrm rot="0">
             <a:off x="4308945" y="704850"/>
-            <a:ext cx="9670110" cy="2995557"/>
+            <a:ext cx="9670110" cy="1554931"/>
           </a:xfrm>
           <a:prstGeom prst="rect">
             <a:avLst/>
@@ -12243,7 +12244,7 @@
                 <a:cs typeface="Handyman"/>
                 <a:sym typeface="Handyman"/>
               </a:rPr>
-              <a:t>Quais são as funções do app?</a:t>
+              <a:t>Saibam que:</a:t>
             </a:r>
           </a:p>
         </p:txBody>
@@ -12256,8 +12257,8 @@
         </p:nvSpPr>
         <p:spPr>
           <a:xfrm rot="0">
-            <a:off x="1692215" y="5451321"/>
-            <a:ext cx="14680579" cy="3806979"/>
+            <a:off x="2985078" y="3829749"/>
+            <a:ext cx="12490940" cy="3856595"/>
           </a:xfrm>
           <a:prstGeom prst="rect">
             <a:avLst/>
@@ -12271,14 +12272,14 @@
           <a:p>
             <a:pPr algn="ctr" marL="0" indent="0" lvl="0">
               <a:lnSpc>
-                <a:spcPts val="9916"/>
+                <a:spcPts val="10055"/>
               </a:lnSpc>
               <a:spcBef>
                 <a:spcPct val="0"/>
               </a:spcBef>
             </a:pPr>
             <a:r>
-              <a:rPr lang="en-US" sz="7083">
+              <a:rPr lang="en-US" sz="7182">
                 <a:solidFill>
                   <a:srgbClr val="A6A6A6"/>
                 </a:solidFill>
@@ -12287,7 +12288,7 @@
                 <a:cs typeface="Handyman"/>
                 <a:sym typeface="Handyman"/>
               </a:rPr>
-              <a:t>Botão de Pânico: clique nesee Botão e ele telefona automaticamente pro 180 em um simples toque!</a:t>
+              <a:t>O 180, central de atendimento a mulher, tem um número de WhatsApp, e até e-mail!</a:t>
             </a:r>
           </a:p>
         </p:txBody>
@@ -12303,7 +12304,7 @@
 </p:sld>
 </file>
 
-<file path=ppt/slides/slide7.xml><?xml version="1.0" encoding="utf-8"?>
+<file path=ppt/slides/slide6.xml><?xml version="1.0" encoding="utf-8"?>
 <p:sld xmlns:p="http://schemas.openxmlformats.org/presentationml/2006/main" xmlns:a="http://schemas.openxmlformats.org/drawingml/2006/main" xmlns:r="http://schemas.openxmlformats.org/officeDocument/2006/relationships">
   <p:cSld>
     <p:spTree>
@@ -12575,8 +12576,8 @@
         </p:nvSpPr>
         <p:spPr>
           <a:xfrm rot="0">
-            <a:off x="1241066" y="5169367"/>
-            <a:ext cx="15805868" cy="4088933"/>
+            <a:off x="1778763" y="5451321"/>
+            <a:ext cx="14680579" cy="3806979"/>
           </a:xfrm>
           <a:prstGeom prst="rect">
             <a:avLst/>
@@ -12590,14 +12591,14 @@
           <a:p>
             <a:pPr algn="ctr" marL="0" indent="0" lvl="0">
               <a:lnSpc>
-                <a:spcPts val="8029"/>
+                <a:spcPts val="9916"/>
               </a:lnSpc>
               <a:spcBef>
                 <a:spcPct val="0"/>
               </a:spcBef>
             </a:pPr>
             <a:r>
-              <a:rPr lang="en-US" sz="5735">
+              <a:rPr lang="en-US" sz="7083">
                 <a:solidFill>
                   <a:srgbClr val="A6A6A6"/>
                 </a:solidFill>
@@ -12606,7 +12607,7 @@
                 <a:cs typeface="Handyman"/>
                 <a:sym typeface="Handyman"/>
               </a:rPr>
-              <a:t>Proteção por barulho: ative e ao bater palmas ou fazer barulho muito alto, ele telefona automaticamente para o 180 sem precisar discar no app de telefone!</a:t>
+              <a:t>Botão de Pânico: clique nesee Botão e ele telefona automaticamente pro 180 em um simples toque!</a:t>
             </a:r>
           </a:p>
         </p:txBody>
@@ -12622,7 +12623,7 @@
 </p:sld>
 </file>
 
-<file path=ppt/slides/slide8.xml><?xml version="1.0" encoding="utf-8"?>
+<file path=ppt/slides/slide7.xml><?xml version="1.0" encoding="utf-8"?>
 <p:sld xmlns:p="http://schemas.openxmlformats.org/presentationml/2006/main" xmlns:a="http://schemas.openxmlformats.org/drawingml/2006/main" xmlns:r="http://schemas.openxmlformats.org/officeDocument/2006/relationships">
   <p:cSld>
     <p:spTree>
@@ -12894,8 +12895,8 @@
         </p:nvSpPr>
         <p:spPr>
           <a:xfrm rot="0">
-            <a:off x="2480681" y="4794434"/>
-            <a:ext cx="13326637" cy="4463866"/>
+            <a:off x="1241066" y="5169367"/>
+            <a:ext cx="15805868" cy="4088933"/>
           </a:xfrm>
           <a:prstGeom prst="rect">
             <a:avLst/>
@@ -12909,14 +12910,14 @@
           <a:p>
             <a:pPr algn="ctr" marL="0" indent="0" lvl="0">
               <a:lnSpc>
-                <a:spcPts val="8789"/>
+                <a:spcPts val="8029"/>
               </a:lnSpc>
               <a:spcBef>
                 <a:spcPct val="0"/>
               </a:spcBef>
             </a:pPr>
             <a:r>
-              <a:rPr lang="en-US" sz="6278">
+              <a:rPr lang="en-US" sz="5735">
                 <a:solidFill>
                   <a:srgbClr val="A6A6A6"/>
                 </a:solidFill>
@@ -12925,7 +12926,7 @@
                 <a:cs typeface="Handyman"/>
                 <a:sym typeface="Handyman"/>
               </a:rPr>
-              <a:t>Balançe o celular para pedir ajuda: ao ativar, quando chacalhoar o celular, ele liga automaticamente pro 180 sem precisar discar no telefone!</a:t>
+              <a:t>Proteção por barulho: ative e ao bater palmas ou fazer barulho muito alto, ele telefona automaticamente para o 180 sem precisar discar no app de telefone!</a:t>
             </a:r>
           </a:p>
         </p:txBody>
@@ -12941,7 +12942,7 @@
 </p:sld>
 </file>
 
-<file path=ppt/slides/slide9.xml><?xml version="1.0" encoding="utf-8"?>
+<file path=ppt/slides/slide8.xml><?xml version="1.0" encoding="utf-8"?>
 <p:sld xmlns:p="http://schemas.openxmlformats.org/presentationml/2006/main" xmlns:a="http://schemas.openxmlformats.org/drawingml/2006/main" xmlns:r="http://schemas.openxmlformats.org/officeDocument/2006/relationships">
   <p:cSld>
     <p:spTree>
@@ -13213,7 +13214,326 @@
         </p:nvSpPr>
         <p:spPr>
           <a:xfrm rot="0">
-            <a:off x="1778763" y="4483193"/>
+            <a:off x="2480681" y="4794434"/>
+            <a:ext cx="13326637" cy="4463866"/>
+          </a:xfrm>
+          <a:prstGeom prst="rect">
+            <a:avLst/>
+          </a:prstGeom>
+        </p:spPr>
+        <p:txBody>
+          <a:bodyPr anchor="t" rtlCol="false" tIns="0" lIns="0" bIns="0" rIns="0">
+            <a:spAutoFit/>
+          </a:bodyPr>
+          <a:lstStyle/>
+          <a:p>
+            <a:pPr algn="ctr" marL="0" indent="0" lvl="0">
+              <a:lnSpc>
+                <a:spcPts val="8789"/>
+              </a:lnSpc>
+              <a:spcBef>
+                <a:spcPct val="0"/>
+              </a:spcBef>
+            </a:pPr>
+            <a:r>
+              <a:rPr lang="en-US" sz="6278">
+                <a:solidFill>
+                  <a:srgbClr val="A6A6A6"/>
+                </a:solidFill>
+                <a:latin typeface="Handyman"/>
+                <a:ea typeface="Handyman"/>
+                <a:cs typeface="Handyman"/>
+                <a:sym typeface="Handyman"/>
+              </a:rPr>
+              <a:t>Balançe o celular para pedir ajuda: ao ativar, quando chacalhoar o celular, ele liga automaticamente pro 180 sem precisar discar no telefone!</a:t>
+            </a:r>
+          </a:p>
+        </p:txBody>
+      </p:sp>
+    </p:spTree>
+  </p:cSld>
+  <p:clrMapOvr>
+    <a:masterClrMapping/>
+  </p:clrMapOvr>
+  <p:transition spd="slow">
+    <p:push dir="l"/>
+  </p:transition>
+</p:sld>
+</file>
+
+<file path=ppt/slides/slide9.xml><?xml version="1.0" encoding="utf-8"?>
+<p:sld xmlns:p="http://schemas.openxmlformats.org/presentationml/2006/main" xmlns:a="http://schemas.openxmlformats.org/drawingml/2006/main" xmlns:r="http://schemas.openxmlformats.org/officeDocument/2006/relationships">
+  <p:cSld>
+    <p:spTree>
+      <p:nvGrpSpPr>
+        <p:cNvPr id="1" name=""/>
+        <p:cNvGrpSpPr/>
+        <p:nvPr/>
+      </p:nvGrpSpPr>
+      <p:grpSpPr>
+        <a:xfrm>
+          <a:off x="0" y="0"/>
+          <a:ext cx="0" cy="0"/>
+          <a:chOff x="0" y="0"/>
+          <a:chExt cx="0" cy="0"/>
+        </a:xfrm>
+      </p:grpSpPr>
+      <p:grpSp>
+        <p:nvGrpSpPr>
+          <p:cNvPr name="Group 2" id="2"/>
+          <p:cNvGrpSpPr/>
+          <p:nvPr/>
+        </p:nvGrpSpPr>
+        <p:grpSpPr>
+          <a:xfrm rot="0">
+            <a:off x="572449" y="669078"/>
+            <a:ext cx="2412630" cy="1326234"/>
+            <a:chOff x="0" y="0"/>
+            <a:chExt cx="2454071" cy="1349024"/>
+          </a:xfrm>
+        </p:grpSpPr>
+        <p:sp>
+          <p:nvSpPr>
+            <p:cNvPr name="Freeform 3" id="3"/>
+            <p:cNvSpPr/>
+            <p:nvPr/>
+          </p:nvSpPr>
+          <p:spPr>
+            <a:xfrm flipH="false" flipV="false" rot="0">
+              <a:off x="0" y="0"/>
+              <a:ext cx="2454071" cy="1349024"/>
+            </a:xfrm>
+            <a:custGeom>
+              <a:avLst/>
+              <a:gdLst/>
+              <a:ahLst/>
+              <a:cxnLst/>
+              <a:rect r="r" b="b" t="t" l="l"/>
+              <a:pathLst>
+                <a:path h="1349024" w="2454071">
+                  <a:moveTo>
+                    <a:pt x="2454071" y="674512"/>
+                  </a:moveTo>
+                  <a:lnTo>
+                    <a:pt x="2454071" y="674512"/>
+                  </a:lnTo>
+                  <a:cubicBezTo>
+                    <a:pt x="2454071" y="1047035"/>
+                    <a:pt x="2152081" y="1349024"/>
+                    <a:pt x="1779559" y="1349024"/>
+                  </a:cubicBezTo>
+                  <a:lnTo>
+                    <a:pt x="674512" y="1349024"/>
+                  </a:lnTo>
+                  <a:cubicBezTo>
+                    <a:pt x="301989" y="1349024"/>
+                    <a:pt x="0" y="1047035"/>
+                    <a:pt x="0" y="674512"/>
+                  </a:cubicBezTo>
+                  <a:lnTo>
+                    <a:pt x="0" y="674512"/>
+                  </a:lnTo>
+                  <a:cubicBezTo>
+                    <a:pt x="0" y="301989"/>
+                    <a:pt x="301989" y="0"/>
+                    <a:pt x="674512" y="0"/>
+                  </a:cubicBezTo>
+                  <a:lnTo>
+                    <a:pt x="1779559" y="0"/>
+                  </a:lnTo>
+                  <a:cubicBezTo>
+                    <a:pt x="1958450" y="0"/>
+                    <a:pt x="2130015" y="71064"/>
+                    <a:pt x="2256511" y="197560"/>
+                  </a:cubicBezTo>
+                  <a:cubicBezTo>
+                    <a:pt x="2383006" y="324056"/>
+                    <a:pt x="2454071" y="495620"/>
+                    <a:pt x="2454071" y="674512"/>
+                  </a:cubicBezTo>
+                  <a:close/>
+                </a:path>
+              </a:pathLst>
+            </a:custGeom>
+            <a:solidFill>
+              <a:srgbClr val="FFC9C9"/>
+            </a:solidFill>
+          </p:spPr>
+        </p:sp>
+        <p:sp>
+          <p:nvSpPr>
+            <p:cNvPr name="TextBox 4" id="4"/>
+            <p:cNvSpPr txBox="true"/>
+            <p:nvPr/>
+          </p:nvSpPr>
+          <p:spPr>
+            <a:xfrm>
+              <a:off x="0" y="-38100"/>
+              <a:ext cx="2454071" cy="1387124"/>
+            </a:xfrm>
+            <a:prstGeom prst="rect">
+              <a:avLst/>
+            </a:prstGeom>
+          </p:spPr>
+          <p:txBody>
+            <a:bodyPr anchor="ctr" rtlCol="false" tIns="50800" lIns="50800" bIns="50800" rIns="50800"/>
+            <a:lstStyle/>
+            <a:p>
+              <a:pPr algn="ctr">
+                <a:lnSpc>
+                  <a:spcPts val="2659"/>
+                </a:lnSpc>
+                <a:spcBef>
+                  <a:spcPct val="0"/>
+                </a:spcBef>
+              </a:pPr>
+            </a:p>
+          </p:txBody>
+        </p:sp>
+      </p:grpSp>
+      <p:sp>
+        <p:nvSpPr>
+          <p:cNvPr name="Freeform 5" id="5"/>
+          <p:cNvSpPr/>
+          <p:nvPr/>
+        </p:nvSpPr>
+        <p:spPr>
+          <a:xfrm flipH="false" flipV="false" rot="0">
+            <a:off x="789916" y="881046"/>
+            <a:ext cx="902299" cy="902299"/>
+          </a:xfrm>
+          <a:custGeom>
+            <a:avLst/>
+            <a:gdLst/>
+            <a:ahLst/>
+            <a:cxnLst/>
+            <a:rect r="r" b="b" t="t" l="l"/>
+            <a:pathLst>
+              <a:path h="902299" w="902299">
+                <a:moveTo>
+                  <a:pt x="0" y="0"/>
+                </a:moveTo>
+                <a:lnTo>
+                  <a:pt x="902299" y="0"/>
+                </a:lnTo>
+                <a:lnTo>
+                  <a:pt x="902299" y="902299"/>
+                </a:lnTo>
+                <a:lnTo>
+                  <a:pt x="0" y="902299"/>
+                </a:lnTo>
+                <a:lnTo>
+                  <a:pt x="0" y="0"/>
+                </a:lnTo>
+                <a:close/>
+              </a:path>
+            </a:pathLst>
+          </a:custGeom>
+          <a:blipFill>
+            <a:blip r:embed="rId2"/>
+            <a:stretch>
+              <a:fillRect l="0" t="0" r="0" b="0"/>
+            </a:stretch>
+          </a:blipFill>
+        </p:spPr>
+      </p:sp>
+      <p:sp>
+        <p:nvSpPr>
+          <p:cNvPr name="TextBox 6" id="6"/>
+          <p:cNvSpPr txBox="true"/>
+          <p:nvPr/>
+        </p:nvSpPr>
+        <p:spPr>
+          <a:xfrm rot="0">
+            <a:off x="2003964" y="759317"/>
+            <a:ext cx="476717" cy="945731"/>
+          </a:xfrm>
+          <a:prstGeom prst="rect">
+            <a:avLst/>
+          </a:prstGeom>
+        </p:spPr>
+        <p:txBody>
+          <a:bodyPr anchor="t" rtlCol="false" tIns="0" lIns="0" bIns="0" rIns="0">
+            <a:spAutoFit/>
+          </a:bodyPr>
+          <a:lstStyle/>
+          <a:p>
+            <a:pPr algn="ctr" marL="0" indent="0" lvl="0">
+              <a:lnSpc>
+                <a:spcPts val="6996"/>
+              </a:lnSpc>
+              <a:spcBef>
+                <a:spcPct val="0"/>
+              </a:spcBef>
+            </a:pPr>
+            <a:r>
+              <a:rPr lang="en-US" sz="4997">
+                <a:solidFill>
+                  <a:srgbClr val="F88888"/>
+                </a:solidFill>
+                <a:latin typeface="Handyman"/>
+                <a:ea typeface="Handyman"/>
+                <a:cs typeface="Handyman"/>
+                <a:sym typeface="Handyman"/>
+              </a:rPr>
+              <a:t>M</a:t>
+            </a:r>
+          </a:p>
+        </p:txBody>
+      </p:sp>
+      <p:sp>
+        <p:nvSpPr>
+          <p:cNvPr name="TextBox 7" id="7"/>
+          <p:cNvSpPr txBox="true"/>
+          <p:nvPr/>
+        </p:nvSpPr>
+        <p:spPr>
+          <a:xfrm rot="0">
+            <a:off x="4308945" y="704850"/>
+            <a:ext cx="9670110" cy="2995557"/>
+          </a:xfrm>
+          <a:prstGeom prst="rect">
+            <a:avLst/>
+          </a:prstGeom>
+        </p:spPr>
+        <p:txBody>
+          <a:bodyPr anchor="t" rtlCol="false" tIns="0" lIns="0" bIns="0" rIns="0">
+            <a:spAutoFit/>
+          </a:bodyPr>
+          <a:lstStyle/>
+          <a:p>
+            <a:pPr algn="ctr" marL="0" indent="0" lvl="0">
+              <a:lnSpc>
+                <a:spcPts val="11549"/>
+              </a:lnSpc>
+              <a:spcBef>
+                <a:spcPct val="0"/>
+              </a:spcBef>
+            </a:pPr>
+            <a:r>
+              <a:rPr lang="en-US" sz="8249">
+                <a:solidFill>
+                  <a:srgbClr val="000000"/>
+                </a:solidFill>
+                <a:latin typeface="Handyman"/>
+                <a:ea typeface="Handyman"/>
+                <a:cs typeface="Handyman"/>
+                <a:sym typeface="Handyman"/>
+              </a:rPr>
+              <a:t>Quais são as funções do app?</a:t>
+            </a:r>
+          </a:p>
+        </p:txBody>
+      </p:sp>
+      <p:sp>
+        <p:nvSpPr>
+          <p:cNvPr name="TextBox 8" id="8"/>
+          <p:cNvSpPr txBox="true"/>
+          <p:nvPr/>
+        </p:nvSpPr>
+        <p:spPr>
+          <a:xfrm rot="0">
+            <a:off x="1692215" y="4483193"/>
             <a:ext cx="14688513" cy="4775107"/>
           </a:xfrm>
           <a:prstGeom prst="rect">

--- a/material2.pptx
+++ b/material2.pptx
@@ -13245,7 +13245,7 @@
                 <a:cs typeface="Handyman"/>
                 <a:sym typeface="Handyman"/>
               </a:rPr>
-              <a:t>Balançe o celular para pedir ajuda: ao ativar, quando chacalhoar o celular, ele liga automaticamente pro 180 sem precisar discar no telefone!</a:t>
+              <a:t>Balançe o celular para pedir ajuda: ao ativar, quando chacalhoar o celular, ele abre o telefone nativo do celular com o 180 já discado!</a:t>
             </a:r>
           </a:p>
         </p:txBody>
